--- a/dist/초1/수학/모양과비교/초1_수학_모양과비교_03_길이와높이비교.pptx
+++ b/dist/초1/수학/모양과비교/초1_수학_모양과비교_03_길이와높이비교.pptx
@@ -120,13 +120,13 @@
   <p:extLst>
     <p:ext uri="{521415D9-36F7-43E2-AB2F-B90AF26B5E84}">
       <p14:sectionLst xmlns:p14="http://schemas.microsoft.com/office/powerpoint/2010/main">
-        <p14:section name="도입" id="{49e4d07e-8682-a648-d799-f348949fdae1}">
+        <p14:section name="도입" id="{2eccec17-e94b-b1a5-be12-dac6d221e558}">
           <p14:sldIdLst>
             <p14:sldId id="256"/>
             <p14:sldId id="257"/>
           </p14:sldIdLst>
         </p14:section>
-        <p14:section name="개념" id="{87b2ce53-f134-a53b-f845-8ec0d594d1e3}">
+        <p14:section name="개념" id="{0466fb95-6983-e00b-6d94-6f6efd293bdd}">
           <p14:sldIdLst>
             <p14:sldId id="258"/>
             <p14:sldId id="259"/>
@@ -134,26 +134,26 @@
             <p14:sldId id="261"/>
           </p14:sldIdLst>
         </p14:section>
-        <p14:section name="연습" id="{8078fa00-5c1d-19fa-4cef-ca09bbd96245}">
+        <p14:section name="연습" id="{84064312-a524-9403-7122-edc744b23361}">
           <p14:sldIdLst>
             <p14:sldId id="262"/>
             <p14:sldId id="263"/>
             <p14:sldId id="264"/>
           </p14:sldIdLst>
         </p14:section>
-        <p14:section name="확인" id="{717c7d05-e325-21c3-6759-8a2a6be261ed}">
+        <p14:section name="확인" id="{f1227ae4-a036-18c4-52ca-7c71242c09cd}">
           <p14:sldIdLst>
             <p14:sldId id="265"/>
             <p14:sldId id="266"/>
             <p14:sldId id="267"/>
           </p14:sldIdLst>
         </p14:section>
-        <p14:section name="정리" id="{f1dc060d-6c62-e4ae-9a61-9b5e34dc7fae}">
+        <p14:section name="정리" id="{5abfc297-9070-49bb-0a3e-7a929f41bfaa}">
           <p14:sldIdLst>
             <p14:sldId id="268"/>
           </p14:sldIdLst>
         </p14:section>
-        <p14:section name="보충" id="{8bf592f2-6d93-a3fc-4370-c1dbf66b40ea}">
+        <p14:section name="보충" id="{16ed984f-9ec3-e878-642f-576b04eaff18}">
           <p14:sldIdLst>
             <p14:sldId id="269"/>
           </p14:sldIdLst>
@@ -5728,7 +5728,7 @@
                 <a:ea typeface="맑은 고딕" pitchFamily="34" charset="-122"/>
                 <a:cs typeface="맑은 고딕" pitchFamily="34" charset="-120"/>
               </a:rPr>
-              <a:t>보충: 어느 쪽이 더 많을까?</a:t>
+              <a:t>보충: 더 많은 쪽은?</a:t>
             </a:r>
             <a:endParaRPr lang="ko-KR" sz="4400" dirty="0"/>
           </a:p>

--- a/dist/초1/수학/모양과비교/초1_수학_모양과비교_03_길이와높이비교.pptx
+++ b/dist/초1/수학/모양과비교/초1_수학_모양과비교_03_길이와높이비교.pptx
@@ -120,13 +120,13 @@
   <p:extLst>
     <p:ext uri="{521415D9-36F7-43E2-AB2F-B90AF26B5E84}">
       <p14:sectionLst xmlns:p14="http://schemas.microsoft.com/office/powerpoint/2010/main">
-        <p14:section name="도입" id="{2eccec17-e94b-b1a5-be12-dac6d221e558}">
+        <p14:section name="도입" id="{ac6556b7-98b9-119e-16c0-f5e5028a627c}">
           <p14:sldIdLst>
             <p14:sldId id="256"/>
             <p14:sldId id="257"/>
           </p14:sldIdLst>
         </p14:section>
-        <p14:section name="개념" id="{0466fb95-6983-e00b-6d94-6f6efd293bdd}">
+        <p14:section name="개념" id="{4cc2e710-b65f-c097-aad4-95465da5a4d5}">
           <p14:sldIdLst>
             <p14:sldId id="258"/>
             <p14:sldId id="259"/>
@@ -134,26 +134,26 @@
             <p14:sldId id="261"/>
           </p14:sldIdLst>
         </p14:section>
-        <p14:section name="연습" id="{84064312-a524-9403-7122-edc744b23361}">
+        <p14:section name="연습" id="{41ce88f8-497d-cd95-35f9-164b2696039e}">
           <p14:sldIdLst>
             <p14:sldId id="262"/>
             <p14:sldId id="263"/>
             <p14:sldId id="264"/>
           </p14:sldIdLst>
         </p14:section>
-        <p14:section name="확인" id="{f1227ae4-a036-18c4-52ca-7c71242c09cd}">
+        <p14:section name="확인" id="{243b5fb5-d7b9-bf95-83ea-ded20114bca8}">
           <p14:sldIdLst>
             <p14:sldId id="265"/>
             <p14:sldId id="266"/>
             <p14:sldId id="267"/>
           </p14:sldIdLst>
         </p14:section>
-        <p14:section name="정리" id="{5abfc297-9070-49bb-0a3e-7a929f41bfaa}">
+        <p14:section name="정리" id="{03f3daa0-481d-efdf-8b16-f657f7d5b371}">
           <p14:sldIdLst>
             <p14:sldId id="268"/>
           </p14:sldIdLst>
         </p14:section>
-        <p14:section name="보충" id="{16ed984f-9ec3-e878-642f-576b04eaff18}">
+        <p14:section name="보충" id="{a8e675fb-75ae-2659-72cd-9e507d4d548a}">
           <p14:sldIdLst>
             <p14:sldId id="269"/>
           </p14:sldIdLst>

--- a/dist/초1/수학/모양과비교/초1_수학_모양과비교_03_길이와높이비교.pptx
+++ b/dist/초1/수학/모양과비교/초1_수학_모양과비교_03_길이와높이비교.pptx
@@ -120,13 +120,13 @@
   <p:extLst>
     <p:ext uri="{521415D9-36F7-43E2-AB2F-B90AF26B5E84}">
       <p14:sectionLst xmlns:p14="http://schemas.microsoft.com/office/powerpoint/2010/main">
-        <p14:section name="도입" id="{ac6556b7-98b9-119e-16c0-f5e5028a627c}">
+        <p14:section name="도입" id="{6f0e735f-9e3f-b715-6f16-f22297945132}">
           <p14:sldIdLst>
             <p14:sldId id="256"/>
             <p14:sldId id="257"/>
           </p14:sldIdLst>
         </p14:section>
-        <p14:section name="개념" id="{4cc2e710-b65f-c097-aad4-95465da5a4d5}">
+        <p14:section name="개념" id="{37c0bb9a-e9c0-0681-3154-da49167ac140}">
           <p14:sldIdLst>
             <p14:sldId id="258"/>
             <p14:sldId id="259"/>
@@ -134,26 +134,26 @@
             <p14:sldId id="261"/>
           </p14:sldIdLst>
         </p14:section>
-        <p14:section name="연습" id="{41ce88f8-497d-cd95-35f9-164b2696039e}">
+        <p14:section name="연습" id="{8272ce7e-63e3-6157-a2f9-933c438f6c5d}">
           <p14:sldIdLst>
             <p14:sldId id="262"/>
             <p14:sldId id="263"/>
             <p14:sldId id="264"/>
           </p14:sldIdLst>
         </p14:section>
-        <p14:section name="확인" id="{243b5fb5-d7b9-bf95-83ea-ded20114bca8}">
+        <p14:section name="확인" id="{76ec298c-f870-0445-b756-62882a933eda}">
           <p14:sldIdLst>
             <p14:sldId id="265"/>
             <p14:sldId id="266"/>
             <p14:sldId id="267"/>
           </p14:sldIdLst>
         </p14:section>
-        <p14:section name="정리" id="{03f3daa0-481d-efdf-8b16-f657f7d5b371}">
+        <p14:section name="정리" id="{945573f4-c01a-b1b5-6261-e466879b55b7}">
           <p14:sldIdLst>
             <p14:sldId id="268"/>
           </p14:sldIdLst>
         </p14:section>
-        <p14:section name="보충" id="{a8e675fb-75ae-2659-72cd-9e507d4d548a}">
+        <p14:section name="보충" id="{b128bdb8-c086-eb78-7279-428da440f621}">
           <p14:sldIdLst>
             <p14:sldId id="269"/>
           </p14:sldIdLst>
